--- a/.lessons/36 Packages Shopping Cart/5 Fetch Products from cart session/1.pptx
+++ b/.lessons/36 Packages Shopping Cart/5 Fetch Products from cart session/1.pptx
@@ -7,7 +7,12 @@
   <p:sldIdLst>
     <p:sldId id="402" r:id="rId2"/>
     <p:sldId id="403" r:id="rId3"/>
-    <p:sldId id="400" r:id="rId4"/>
+    <p:sldId id="404" r:id="rId4"/>
+    <p:sldId id="405" r:id="rId5"/>
+    <p:sldId id="406" r:id="rId6"/>
+    <p:sldId id="407" r:id="rId7"/>
+    <p:sldId id="408" r:id="rId8"/>
+    <p:sldId id="400" r:id="rId9"/>
   </p:sldIdLst>
   <p:sldSz cx="12192000" cy="6858000"/>
   <p:notesSz cx="6858000" cy="9144000"/>
@@ -261,7 +266,7 @@
           <a:p>
             <a:fld id="{3E102D2E-813C-461C-9963-687A650C48C0}" type="datetimeFigureOut">
               <a:rPr lang="en-US" smtClean="0"/>
-              <a:t>5/23/2025</a:t>
+              <a:t>6/20/2025</a:t>
             </a:fld>
             <a:endParaRPr lang="en-US"/>
           </a:p>
@@ -459,7 +464,7 @@
           <a:p>
             <a:fld id="{3E102D2E-813C-461C-9963-687A650C48C0}" type="datetimeFigureOut">
               <a:rPr lang="en-US" smtClean="0"/>
-              <a:t>5/23/2025</a:t>
+              <a:t>6/20/2025</a:t>
             </a:fld>
             <a:endParaRPr lang="en-US"/>
           </a:p>
@@ -667,7 +672,7 @@
           <a:p>
             <a:fld id="{3E102D2E-813C-461C-9963-687A650C48C0}" type="datetimeFigureOut">
               <a:rPr lang="en-US" smtClean="0"/>
-              <a:t>5/23/2025</a:t>
+              <a:t>6/20/2025</a:t>
             </a:fld>
             <a:endParaRPr lang="en-US"/>
           </a:p>
@@ -865,7 +870,7 @@
           <a:p>
             <a:fld id="{3E102D2E-813C-461C-9963-687A650C48C0}" type="datetimeFigureOut">
               <a:rPr lang="en-US" smtClean="0"/>
-              <a:t>5/23/2025</a:t>
+              <a:t>6/20/2025</a:t>
             </a:fld>
             <a:endParaRPr lang="en-US"/>
           </a:p>
@@ -1140,7 +1145,7 @@
           <a:p>
             <a:fld id="{3E102D2E-813C-461C-9963-687A650C48C0}" type="datetimeFigureOut">
               <a:rPr lang="en-US" smtClean="0"/>
-              <a:t>5/23/2025</a:t>
+              <a:t>6/20/2025</a:t>
             </a:fld>
             <a:endParaRPr lang="en-US"/>
           </a:p>
@@ -1405,7 +1410,7 @@
           <a:p>
             <a:fld id="{3E102D2E-813C-461C-9963-687A650C48C0}" type="datetimeFigureOut">
               <a:rPr lang="en-US" smtClean="0"/>
-              <a:t>5/23/2025</a:t>
+              <a:t>6/20/2025</a:t>
             </a:fld>
             <a:endParaRPr lang="en-US"/>
           </a:p>
@@ -1817,7 +1822,7 @@
           <a:p>
             <a:fld id="{3E102D2E-813C-461C-9963-687A650C48C0}" type="datetimeFigureOut">
               <a:rPr lang="en-US" smtClean="0"/>
-              <a:t>5/23/2025</a:t>
+              <a:t>6/20/2025</a:t>
             </a:fld>
             <a:endParaRPr lang="en-US"/>
           </a:p>
@@ -1958,7 +1963,7 @@
           <a:p>
             <a:fld id="{3E102D2E-813C-461C-9963-687A650C48C0}" type="datetimeFigureOut">
               <a:rPr lang="en-US" smtClean="0"/>
-              <a:t>5/23/2025</a:t>
+              <a:t>6/20/2025</a:t>
             </a:fld>
             <a:endParaRPr lang="en-US"/>
           </a:p>
@@ -2071,7 +2076,7 @@
           <a:p>
             <a:fld id="{3E102D2E-813C-461C-9963-687A650C48C0}" type="datetimeFigureOut">
               <a:rPr lang="en-US" smtClean="0"/>
-              <a:t>5/23/2025</a:t>
+              <a:t>6/20/2025</a:t>
             </a:fld>
             <a:endParaRPr lang="en-US"/>
           </a:p>
@@ -2382,7 +2387,7 @@
           <a:p>
             <a:fld id="{3E102D2E-813C-461C-9963-687A650C48C0}" type="datetimeFigureOut">
               <a:rPr lang="en-US" smtClean="0"/>
-              <a:t>5/23/2025</a:t>
+              <a:t>6/20/2025</a:t>
             </a:fld>
             <a:endParaRPr lang="en-US"/>
           </a:p>
@@ -2670,7 +2675,7 @@
           <a:p>
             <a:fld id="{3E102D2E-813C-461C-9963-687A650C48C0}" type="datetimeFigureOut">
               <a:rPr lang="en-US" smtClean="0"/>
-              <a:t>5/23/2025</a:t>
+              <a:t>6/20/2025</a:t>
             </a:fld>
             <a:endParaRPr lang="en-US"/>
           </a:p>
@@ -2911,7 +2916,7 @@
           <a:p>
             <a:fld id="{3E102D2E-813C-461C-9963-687A650C48C0}" type="datetimeFigureOut">
               <a:rPr lang="en-US" smtClean="0"/>
-              <a:t>5/23/2025</a:t>
+              <a:t>6/20/2025</a:t>
             </a:fld>
             <a:endParaRPr lang="en-US"/>
           </a:p>
@@ -3349,7 +3354,7 @@
         <p:spPr>
           <a:xfrm>
             <a:off x="217714" y="255046"/>
-            <a:ext cx="11756571" cy="355354"/>
+            <a:ext cx="11756571" cy="655436"/>
           </a:xfrm>
           <a:prstGeom prst="rect">
             <a:avLst/>
@@ -3369,21 +3374,96 @@
               <a:buNone/>
             </a:pPr>
             <a:r>
-              <a:rPr kumimoji="0" lang="en-US" altLang="en-US" sz="1300" b="0" i="0" u="none" strike="noStrike" cap="none" normalizeH="0" baseline="0">
-                <a:ln>
-                  <a:noFill/>
-                </a:ln>
-                <a:solidFill>
-                  <a:schemeClr val="tx1"/>
-                </a:solidFill>
-                <a:effectLst/>
+              <a:rPr lang="az-Latn-AZ" altLang="en-US" sz="1300" b="1">
                 <a:latin typeface="Arial" panose="020B0604020202020204" pitchFamily="34" charset="0"/>
               </a:rPr>
-              <a:t>.</a:t>
-            </a:r>
-          </a:p>
-        </p:txBody>
-      </p:sp>
+              <a:t>CART</a:t>
+            </a:r>
+            <a:r>
+              <a:rPr lang="az-Latn-AZ" altLang="en-US" sz="1300">
+                <a:latin typeface="Arial" panose="020B0604020202020204" pitchFamily="34" charset="0"/>
+              </a:rPr>
+              <a:t> klası ilə </a:t>
+            </a:r>
+            <a:r>
+              <a:rPr lang="az-Latn-AZ" altLang="en-US" sz="1300" b="1">
+                <a:latin typeface="Arial" panose="020B0604020202020204" pitchFamily="34" charset="0"/>
+              </a:rPr>
+              <a:t>session</a:t>
+            </a:r>
+            <a:r>
+              <a:rPr lang="az-Latn-AZ" altLang="en-US" sz="1300">
+                <a:latin typeface="Arial" panose="020B0604020202020204" pitchFamily="34" charset="0"/>
+              </a:rPr>
+              <a:t> -larda saxlanılan dataları əldə etmək üçün həmin klasın </a:t>
+            </a:r>
+            <a:r>
+              <a:rPr lang="az-Latn-AZ" altLang="en-US" sz="1300" b="1">
+                <a:latin typeface="Arial" panose="020B0604020202020204" pitchFamily="34" charset="0"/>
+              </a:rPr>
+              <a:t>content() </a:t>
+            </a:r>
+            <a:r>
+              <a:rPr lang="az-Latn-AZ" altLang="en-US" sz="1300">
+                <a:latin typeface="Arial" panose="020B0604020202020204" pitchFamily="34" charset="0"/>
+              </a:rPr>
+              <a:t>metodundan istifadə edə bilərk. Bu haqqda </a:t>
+            </a:r>
+            <a:r>
+              <a:rPr lang="az-Latn-AZ" altLang="en-US" sz="1300" b="1">
+                <a:latin typeface="Arial" panose="020B0604020202020204" pitchFamily="34" charset="0"/>
+              </a:rPr>
+              <a:t>Cart</a:t>
+            </a:r>
+            <a:r>
+              <a:rPr lang="az-Latn-AZ" altLang="en-US" sz="1300">
+                <a:latin typeface="Arial" panose="020B0604020202020204" pitchFamily="34" charset="0"/>
+              </a:rPr>
+              <a:t> klasının yaradıldığı paketində yazılmışdır.</a:t>
+            </a:r>
+            <a:endParaRPr kumimoji="0" lang="en-US" altLang="en-US" sz="1300" b="0" i="0" u="none" strike="noStrike" cap="none" normalizeH="0" baseline="0">
+              <a:ln>
+                <a:noFill/>
+              </a:ln>
+              <a:solidFill>
+                <a:schemeClr val="tx1"/>
+              </a:solidFill>
+              <a:effectLst/>
+              <a:latin typeface="Arial" panose="020B0604020202020204" pitchFamily="34" charset="0"/>
+            </a:endParaRPr>
+          </a:p>
+        </p:txBody>
+      </p:sp>
+      <p:pic>
+        <p:nvPicPr>
+          <p:cNvPr id="4" name="Picture 3">
+            <a:extLst>
+              <a:ext uri="{FF2B5EF4-FFF2-40B4-BE49-F238E27FC236}">
+                <a16:creationId xmlns:a16="http://schemas.microsoft.com/office/drawing/2014/main" id="{9834088D-A3BD-F156-A4C7-791B328405C4}"/>
+              </a:ext>
+            </a:extLst>
+          </p:cNvPr>
+          <p:cNvPicPr>
+            <a:picLocks noChangeAspect="1"/>
+          </p:cNvPicPr>
+          <p:nvPr/>
+        </p:nvPicPr>
+        <p:blipFill>
+          <a:blip r:embed="rId2"/>
+          <a:stretch>
+            <a:fillRect/>
+          </a:stretch>
+        </p:blipFill>
+        <p:spPr>
+          <a:xfrm>
+            <a:off x="0" y="1179284"/>
+            <a:ext cx="12192000" cy="3754331"/>
+          </a:xfrm>
+          <a:prstGeom prst="rect">
+            <a:avLst/>
+          </a:prstGeom>
+        </p:spPr>
+      </p:pic>
     </p:spTree>
     <p:extLst>
       <p:ext uri="{BB962C8B-B14F-4D97-AF65-F5344CB8AC3E}">
@@ -3435,7 +3515,7 @@
         <p:spPr>
           <a:xfrm>
             <a:off x="217714" y="255046"/>
-            <a:ext cx="11756571" cy="355354"/>
+            <a:ext cx="4223657" cy="2155847"/>
           </a:xfrm>
           <a:prstGeom prst="rect">
             <a:avLst/>
@@ -3455,21 +3535,99 @@
               <a:buNone/>
             </a:pPr>
             <a:r>
-              <a:rPr kumimoji="0" lang="en-US" altLang="en-US" sz="1300" b="0" i="0" u="none" strike="noStrike" cap="none" normalizeH="0" baseline="0">
-                <a:ln>
-                  <a:noFill/>
-                </a:ln>
-                <a:solidFill>
-                  <a:schemeClr val="tx1"/>
-                </a:solidFill>
-                <a:effectLst/>
+              <a:rPr lang="az-Latn-AZ" altLang="en-US" sz="1300">
                 <a:latin typeface="Arial" panose="020B0604020202020204" pitchFamily="34" charset="0"/>
               </a:rPr>
-              <a:t>.</a:t>
-            </a:r>
-          </a:p>
-        </p:txBody>
-      </p:sp>
+              <a:t>Bu kodu sadəcə dataların mövcud olub olmadığını yoxlamaq üçün yazdıq.  </a:t>
+            </a:r>
+          </a:p>
+          <a:p>
+            <a:pPr>
+              <a:lnSpc>
+                <a:spcPct val="150000"/>
+              </a:lnSpc>
+              <a:buNone/>
+            </a:pPr>
+            <a:endParaRPr lang="az-Latn-AZ" altLang="en-US" sz="1300">
+              <a:latin typeface="Arial" panose="020B0604020202020204" pitchFamily="34" charset="0"/>
+            </a:endParaRPr>
+          </a:p>
+          <a:p>
+            <a:pPr>
+              <a:lnSpc>
+                <a:spcPct val="150000"/>
+              </a:lnSpc>
+              <a:buNone/>
+            </a:pPr>
+            <a:r>
+              <a:rPr lang="az-Latn-AZ" altLang="en-US" sz="1300">
+                <a:latin typeface="Arial" panose="020B0604020202020204" pitchFamily="34" charset="0"/>
+              </a:rPr>
+              <a:t>Artıq silə bilərik və həmin </a:t>
+            </a:r>
+            <a:r>
+              <a:rPr lang="az-Latn-AZ" altLang="en-US" sz="1300" b="1">
+                <a:latin typeface="Arial" panose="020B0604020202020204" pitchFamily="34" charset="0"/>
+              </a:rPr>
+              <a:t>Cart</a:t>
+            </a:r>
+            <a:r>
+              <a:rPr lang="en-US" altLang="en-US" sz="1300" b="1">
+                <a:latin typeface="Arial" panose="020B0604020202020204" pitchFamily="34" charset="0"/>
+              </a:rPr>
+              <a:t>::content() </a:t>
+            </a:r>
+            <a:r>
+              <a:rPr lang="az-Latn-AZ" altLang="en-US" sz="1300">
+                <a:latin typeface="Arial" panose="020B0604020202020204" pitchFamily="34" charset="0"/>
+              </a:rPr>
+              <a:t>kodunu birbaşa şablonda </a:t>
+            </a:r>
+            <a:r>
+              <a:rPr lang="az-Latn-AZ" altLang="en-US" sz="1300" b="1">
+                <a:latin typeface="Arial" panose="020B0604020202020204" pitchFamily="34" charset="0"/>
+              </a:rPr>
+              <a:t>foreach</a:t>
+            </a:r>
+            <a:r>
+              <a:rPr lang="az-Latn-AZ" altLang="en-US" sz="1300">
+                <a:latin typeface="Arial" panose="020B0604020202020204" pitchFamily="34" charset="0"/>
+              </a:rPr>
+              <a:t> konstruktoru içində çağıraraq məlumatları tək-tək əldə edə bilərik. Növbəti slayd.....</a:t>
+            </a:r>
+          </a:p>
+        </p:txBody>
+      </p:sp>
+      <p:pic>
+        <p:nvPicPr>
+          <p:cNvPr id="4" name="Picture 3">
+            <a:extLst>
+              <a:ext uri="{FF2B5EF4-FFF2-40B4-BE49-F238E27FC236}">
+                <a16:creationId xmlns:a16="http://schemas.microsoft.com/office/drawing/2014/main" id="{4319605A-C74F-A378-AF93-A5B7E4C7786B}"/>
+              </a:ext>
+            </a:extLst>
+          </p:cNvPr>
+          <p:cNvPicPr>
+            <a:picLocks noChangeAspect="1"/>
+          </p:cNvPicPr>
+          <p:nvPr/>
+        </p:nvPicPr>
+        <p:blipFill>
+          <a:blip r:embed="rId2"/>
+          <a:stretch>
+            <a:fillRect/>
+          </a:stretch>
+        </p:blipFill>
+        <p:spPr>
+          <a:xfrm>
+            <a:off x="4670991" y="0"/>
+            <a:ext cx="7521009" cy="6858000"/>
+          </a:xfrm>
+          <a:prstGeom prst="rect">
+            <a:avLst/>
+          </a:prstGeom>
+        </p:spPr>
+      </p:pic>
     </p:spTree>
     <p:extLst>
       <p:ext uri="{BB962C8B-B14F-4D97-AF65-F5344CB8AC3E}">
@@ -3484,6 +3642,476 @@
 </file>
 
 <file path=ppt/slides/slide3.xml><?xml version="1.0" encoding="utf-8"?>
+<p:sld xmlns:a="http://schemas.openxmlformats.org/drawingml/2006/main" xmlns:r="http://schemas.openxmlformats.org/officeDocument/2006/relationships" xmlns:p="http://schemas.openxmlformats.org/presentationml/2006/main">
+  <p:cSld>
+    <p:spTree>
+      <p:nvGrpSpPr>
+        <p:cNvPr id="1" name="">
+          <a:extLst>
+            <a:ext uri="{FF2B5EF4-FFF2-40B4-BE49-F238E27FC236}">
+              <a16:creationId xmlns:a16="http://schemas.microsoft.com/office/drawing/2014/main" id="{0F3AF25C-EC90-7188-8881-7C66A40EFAB9}"/>
+            </a:ext>
+          </a:extLst>
+        </p:cNvPr>
+        <p:cNvGrpSpPr/>
+        <p:nvPr/>
+      </p:nvGrpSpPr>
+      <p:grpSpPr>
+        <a:xfrm>
+          <a:off x="0" y="0"/>
+          <a:ext cx="0" cy="0"/>
+          <a:chOff x="0" y="0"/>
+          <a:chExt cx="0" cy="0"/>
+        </a:xfrm>
+      </p:grpSpPr>
+      <p:sp>
+        <p:nvSpPr>
+          <p:cNvPr id="3" name="TextBox 2">
+            <a:extLst>
+              <a:ext uri="{FF2B5EF4-FFF2-40B4-BE49-F238E27FC236}">
+                <a16:creationId xmlns:a16="http://schemas.microsoft.com/office/drawing/2014/main" id="{03FA7583-4372-A593-8381-9EF30000059E}"/>
+              </a:ext>
+            </a:extLst>
+          </p:cNvPr>
+          <p:cNvSpPr txBox="1"/>
+          <p:nvPr/>
+        </p:nvSpPr>
+        <p:spPr>
+          <a:xfrm>
+            <a:off x="217715" y="255046"/>
+            <a:ext cx="2096278" cy="655436"/>
+          </a:xfrm>
+          <a:prstGeom prst="rect">
+            <a:avLst/>
+          </a:prstGeom>
+          <a:noFill/>
+        </p:spPr>
+        <p:txBody>
+          <a:bodyPr wrap="square">
+            <a:spAutoFit/>
+          </a:bodyPr>
+          <a:lstStyle/>
+          <a:p>
+            <a:pPr>
+              <a:lnSpc>
+                <a:spcPct val="150000"/>
+              </a:lnSpc>
+              <a:buNone/>
+            </a:pPr>
+            <a:r>
+              <a:rPr kumimoji="0" lang="az-Latn-AZ" altLang="en-US" sz="1300" b="0" i="0" u="none" strike="noStrike" cap="none" normalizeH="0" baseline="0">
+                <a:ln>
+                  <a:noFill/>
+                </a:ln>
+                <a:solidFill>
+                  <a:schemeClr val="tx1"/>
+                </a:solidFill>
+                <a:effectLst/>
+                <a:latin typeface="Arial" panose="020B0604020202020204" pitchFamily="34" charset="0"/>
+              </a:rPr>
+              <a:t>Dataları şablona göndəririk....</a:t>
+            </a:r>
+            <a:endParaRPr kumimoji="0" lang="en-US" altLang="en-US" sz="1300" b="0" i="0" u="none" strike="noStrike" cap="none" normalizeH="0" baseline="0">
+              <a:ln>
+                <a:noFill/>
+              </a:ln>
+              <a:solidFill>
+                <a:schemeClr val="tx1"/>
+              </a:solidFill>
+              <a:effectLst/>
+              <a:latin typeface="Arial" panose="020B0604020202020204" pitchFamily="34" charset="0"/>
+            </a:endParaRPr>
+          </a:p>
+        </p:txBody>
+      </p:sp>
+      <p:pic>
+        <p:nvPicPr>
+          <p:cNvPr id="6" name="Picture 5">
+            <a:extLst>
+              <a:ext uri="{FF2B5EF4-FFF2-40B4-BE49-F238E27FC236}">
+                <a16:creationId xmlns:a16="http://schemas.microsoft.com/office/drawing/2014/main" id="{9467948F-8E3A-CE5D-BF0E-D646D66AE68A}"/>
+              </a:ext>
+            </a:extLst>
+          </p:cNvPr>
+          <p:cNvPicPr>
+            <a:picLocks noChangeAspect="1"/>
+          </p:cNvPicPr>
+          <p:nvPr/>
+        </p:nvPicPr>
+        <p:blipFill>
+          <a:blip r:embed="rId2"/>
+          <a:stretch>
+            <a:fillRect/>
+          </a:stretch>
+        </p:blipFill>
+        <p:spPr>
+          <a:xfrm>
+            <a:off x="2517705" y="0"/>
+            <a:ext cx="9674295" cy="6858000"/>
+          </a:xfrm>
+          <a:prstGeom prst="rect">
+            <a:avLst/>
+          </a:prstGeom>
+        </p:spPr>
+      </p:pic>
+    </p:spTree>
+    <p:extLst>
+      <p:ext uri="{BB962C8B-B14F-4D97-AF65-F5344CB8AC3E}">
+        <p14:creationId xmlns:p14="http://schemas.microsoft.com/office/powerpoint/2010/main" val="2787663276"/>
+      </p:ext>
+    </p:extLst>
+  </p:cSld>
+  <p:clrMapOvr>
+    <a:masterClrMapping/>
+  </p:clrMapOvr>
+</p:sld>
+</file>
+
+<file path=ppt/slides/slide4.xml><?xml version="1.0" encoding="utf-8"?>
+<p:sld xmlns:a="http://schemas.openxmlformats.org/drawingml/2006/main" xmlns:r="http://schemas.openxmlformats.org/officeDocument/2006/relationships" xmlns:p="http://schemas.openxmlformats.org/presentationml/2006/main">
+  <p:cSld>
+    <p:spTree>
+      <p:nvGrpSpPr>
+        <p:cNvPr id="1" name="">
+          <a:extLst>
+            <a:ext uri="{FF2B5EF4-FFF2-40B4-BE49-F238E27FC236}">
+              <a16:creationId xmlns:a16="http://schemas.microsoft.com/office/drawing/2014/main" id="{FD9ED50D-60D5-53CF-DFA0-6BBE4BD2E94A}"/>
+            </a:ext>
+          </a:extLst>
+        </p:cNvPr>
+        <p:cNvGrpSpPr/>
+        <p:nvPr/>
+      </p:nvGrpSpPr>
+      <p:grpSpPr>
+        <a:xfrm>
+          <a:off x="0" y="0"/>
+          <a:ext cx="0" cy="0"/>
+          <a:chOff x="0" y="0"/>
+          <a:chExt cx="0" cy="0"/>
+        </a:xfrm>
+      </p:grpSpPr>
+      <p:sp>
+        <p:nvSpPr>
+          <p:cNvPr id="3" name="TextBox 2">
+            <a:extLst>
+              <a:ext uri="{FF2B5EF4-FFF2-40B4-BE49-F238E27FC236}">
+                <a16:creationId xmlns:a16="http://schemas.microsoft.com/office/drawing/2014/main" id="{EC72693D-E636-79E5-9DC7-BA26BC775BBA}"/>
+              </a:ext>
+            </a:extLst>
+          </p:cNvPr>
+          <p:cNvSpPr txBox="1"/>
+          <p:nvPr/>
+        </p:nvSpPr>
+        <p:spPr>
+          <a:xfrm>
+            <a:off x="217714" y="255046"/>
+            <a:ext cx="11756571" cy="355354"/>
+          </a:xfrm>
+          <a:prstGeom prst="rect">
+            <a:avLst/>
+          </a:prstGeom>
+          <a:noFill/>
+        </p:spPr>
+        <p:txBody>
+          <a:bodyPr wrap="square">
+            <a:spAutoFit/>
+          </a:bodyPr>
+          <a:lstStyle/>
+          <a:p>
+            <a:pPr>
+              <a:lnSpc>
+                <a:spcPct val="150000"/>
+              </a:lnSpc>
+              <a:buNone/>
+            </a:pPr>
+            <a:r>
+              <a:rPr kumimoji="0" lang="en-US" altLang="en-US" sz="1300" b="0" i="0" u="none" strike="noStrike" cap="none" normalizeH="0" baseline="0">
+                <a:ln>
+                  <a:noFill/>
+                </a:ln>
+                <a:solidFill>
+                  <a:schemeClr val="tx1"/>
+                </a:solidFill>
+                <a:effectLst/>
+                <a:latin typeface="Arial" panose="020B0604020202020204" pitchFamily="34" charset="0"/>
+              </a:rPr>
+              <a:t>.</a:t>
+            </a:r>
+          </a:p>
+        </p:txBody>
+      </p:sp>
+    </p:spTree>
+    <p:extLst>
+      <p:ext uri="{BB962C8B-B14F-4D97-AF65-F5344CB8AC3E}">
+        <p14:creationId xmlns:p14="http://schemas.microsoft.com/office/powerpoint/2010/main" val="517699933"/>
+      </p:ext>
+    </p:extLst>
+  </p:cSld>
+  <p:clrMapOvr>
+    <a:masterClrMapping/>
+  </p:clrMapOvr>
+</p:sld>
+</file>
+
+<file path=ppt/slides/slide5.xml><?xml version="1.0" encoding="utf-8"?>
+<p:sld xmlns:a="http://schemas.openxmlformats.org/drawingml/2006/main" xmlns:r="http://schemas.openxmlformats.org/officeDocument/2006/relationships" xmlns:p="http://schemas.openxmlformats.org/presentationml/2006/main">
+  <p:cSld>
+    <p:spTree>
+      <p:nvGrpSpPr>
+        <p:cNvPr id="1" name="">
+          <a:extLst>
+            <a:ext uri="{FF2B5EF4-FFF2-40B4-BE49-F238E27FC236}">
+              <a16:creationId xmlns:a16="http://schemas.microsoft.com/office/drawing/2014/main" id="{9F288B88-EE32-5E7E-FDFD-209D426A75FF}"/>
+            </a:ext>
+          </a:extLst>
+        </p:cNvPr>
+        <p:cNvGrpSpPr/>
+        <p:nvPr/>
+      </p:nvGrpSpPr>
+      <p:grpSpPr>
+        <a:xfrm>
+          <a:off x="0" y="0"/>
+          <a:ext cx="0" cy="0"/>
+          <a:chOff x="0" y="0"/>
+          <a:chExt cx="0" cy="0"/>
+        </a:xfrm>
+      </p:grpSpPr>
+      <p:sp>
+        <p:nvSpPr>
+          <p:cNvPr id="3" name="TextBox 2">
+            <a:extLst>
+              <a:ext uri="{FF2B5EF4-FFF2-40B4-BE49-F238E27FC236}">
+                <a16:creationId xmlns:a16="http://schemas.microsoft.com/office/drawing/2014/main" id="{D3BF9904-B050-B99E-6B6C-E4B6F0F71218}"/>
+              </a:ext>
+            </a:extLst>
+          </p:cNvPr>
+          <p:cNvSpPr txBox="1"/>
+          <p:nvPr/>
+        </p:nvSpPr>
+        <p:spPr>
+          <a:xfrm>
+            <a:off x="217714" y="255046"/>
+            <a:ext cx="11756571" cy="355354"/>
+          </a:xfrm>
+          <a:prstGeom prst="rect">
+            <a:avLst/>
+          </a:prstGeom>
+          <a:noFill/>
+        </p:spPr>
+        <p:txBody>
+          <a:bodyPr wrap="square">
+            <a:spAutoFit/>
+          </a:bodyPr>
+          <a:lstStyle/>
+          <a:p>
+            <a:pPr>
+              <a:lnSpc>
+                <a:spcPct val="150000"/>
+              </a:lnSpc>
+              <a:buNone/>
+            </a:pPr>
+            <a:r>
+              <a:rPr kumimoji="0" lang="en-US" altLang="en-US" sz="1300" b="0" i="0" u="none" strike="noStrike" cap="none" normalizeH="0" baseline="0">
+                <a:ln>
+                  <a:noFill/>
+                </a:ln>
+                <a:solidFill>
+                  <a:schemeClr val="tx1"/>
+                </a:solidFill>
+                <a:effectLst/>
+                <a:latin typeface="Arial" panose="020B0604020202020204" pitchFamily="34" charset="0"/>
+              </a:rPr>
+              <a:t>.</a:t>
+            </a:r>
+          </a:p>
+        </p:txBody>
+      </p:sp>
+    </p:spTree>
+    <p:extLst>
+      <p:ext uri="{BB962C8B-B14F-4D97-AF65-F5344CB8AC3E}">
+        <p14:creationId xmlns:p14="http://schemas.microsoft.com/office/powerpoint/2010/main" val="2165582559"/>
+      </p:ext>
+    </p:extLst>
+  </p:cSld>
+  <p:clrMapOvr>
+    <a:masterClrMapping/>
+  </p:clrMapOvr>
+</p:sld>
+</file>
+
+<file path=ppt/slides/slide6.xml><?xml version="1.0" encoding="utf-8"?>
+<p:sld xmlns:a="http://schemas.openxmlformats.org/drawingml/2006/main" xmlns:r="http://schemas.openxmlformats.org/officeDocument/2006/relationships" xmlns:p="http://schemas.openxmlformats.org/presentationml/2006/main">
+  <p:cSld>
+    <p:spTree>
+      <p:nvGrpSpPr>
+        <p:cNvPr id="1" name="">
+          <a:extLst>
+            <a:ext uri="{FF2B5EF4-FFF2-40B4-BE49-F238E27FC236}">
+              <a16:creationId xmlns:a16="http://schemas.microsoft.com/office/drawing/2014/main" id="{1D118CB8-1706-8847-6712-9D1A1E1A5DAC}"/>
+            </a:ext>
+          </a:extLst>
+        </p:cNvPr>
+        <p:cNvGrpSpPr/>
+        <p:nvPr/>
+      </p:nvGrpSpPr>
+      <p:grpSpPr>
+        <a:xfrm>
+          <a:off x="0" y="0"/>
+          <a:ext cx="0" cy="0"/>
+          <a:chOff x="0" y="0"/>
+          <a:chExt cx="0" cy="0"/>
+        </a:xfrm>
+      </p:grpSpPr>
+      <p:sp>
+        <p:nvSpPr>
+          <p:cNvPr id="3" name="TextBox 2">
+            <a:extLst>
+              <a:ext uri="{FF2B5EF4-FFF2-40B4-BE49-F238E27FC236}">
+                <a16:creationId xmlns:a16="http://schemas.microsoft.com/office/drawing/2014/main" id="{96B75BA9-C4E0-D988-21D5-ED8801067B3B}"/>
+              </a:ext>
+            </a:extLst>
+          </p:cNvPr>
+          <p:cNvSpPr txBox="1"/>
+          <p:nvPr/>
+        </p:nvSpPr>
+        <p:spPr>
+          <a:xfrm>
+            <a:off x="217714" y="255046"/>
+            <a:ext cx="11756571" cy="355354"/>
+          </a:xfrm>
+          <a:prstGeom prst="rect">
+            <a:avLst/>
+          </a:prstGeom>
+          <a:noFill/>
+        </p:spPr>
+        <p:txBody>
+          <a:bodyPr wrap="square">
+            <a:spAutoFit/>
+          </a:bodyPr>
+          <a:lstStyle/>
+          <a:p>
+            <a:pPr>
+              <a:lnSpc>
+                <a:spcPct val="150000"/>
+              </a:lnSpc>
+              <a:buNone/>
+            </a:pPr>
+            <a:r>
+              <a:rPr kumimoji="0" lang="en-US" altLang="en-US" sz="1300" b="0" i="0" u="none" strike="noStrike" cap="none" normalizeH="0" baseline="0">
+                <a:ln>
+                  <a:noFill/>
+                </a:ln>
+                <a:solidFill>
+                  <a:schemeClr val="tx1"/>
+                </a:solidFill>
+                <a:effectLst/>
+                <a:latin typeface="Arial" panose="020B0604020202020204" pitchFamily="34" charset="0"/>
+              </a:rPr>
+              <a:t>.</a:t>
+            </a:r>
+          </a:p>
+        </p:txBody>
+      </p:sp>
+    </p:spTree>
+    <p:extLst>
+      <p:ext uri="{BB962C8B-B14F-4D97-AF65-F5344CB8AC3E}">
+        <p14:creationId xmlns:p14="http://schemas.microsoft.com/office/powerpoint/2010/main" val="716674619"/>
+      </p:ext>
+    </p:extLst>
+  </p:cSld>
+  <p:clrMapOvr>
+    <a:masterClrMapping/>
+  </p:clrMapOvr>
+</p:sld>
+</file>
+
+<file path=ppt/slides/slide7.xml><?xml version="1.0" encoding="utf-8"?>
+<p:sld xmlns:a="http://schemas.openxmlformats.org/drawingml/2006/main" xmlns:r="http://schemas.openxmlformats.org/officeDocument/2006/relationships" xmlns:p="http://schemas.openxmlformats.org/presentationml/2006/main">
+  <p:cSld>
+    <p:spTree>
+      <p:nvGrpSpPr>
+        <p:cNvPr id="1" name="">
+          <a:extLst>
+            <a:ext uri="{FF2B5EF4-FFF2-40B4-BE49-F238E27FC236}">
+              <a16:creationId xmlns:a16="http://schemas.microsoft.com/office/drawing/2014/main" id="{83229C81-F5C0-8421-E537-F1C5BD55D472}"/>
+            </a:ext>
+          </a:extLst>
+        </p:cNvPr>
+        <p:cNvGrpSpPr/>
+        <p:nvPr/>
+      </p:nvGrpSpPr>
+      <p:grpSpPr>
+        <a:xfrm>
+          <a:off x="0" y="0"/>
+          <a:ext cx="0" cy="0"/>
+          <a:chOff x="0" y="0"/>
+          <a:chExt cx="0" cy="0"/>
+        </a:xfrm>
+      </p:grpSpPr>
+      <p:sp>
+        <p:nvSpPr>
+          <p:cNvPr id="3" name="TextBox 2">
+            <a:extLst>
+              <a:ext uri="{FF2B5EF4-FFF2-40B4-BE49-F238E27FC236}">
+                <a16:creationId xmlns:a16="http://schemas.microsoft.com/office/drawing/2014/main" id="{3FD611F1-B903-AA06-D2CB-76A2516E77CB}"/>
+              </a:ext>
+            </a:extLst>
+          </p:cNvPr>
+          <p:cNvSpPr txBox="1"/>
+          <p:nvPr/>
+        </p:nvSpPr>
+        <p:spPr>
+          <a:xfrm>
+            <a:off x="217714" y="255046"/>
+            <a:ext cx="11756571" cy="355354"/>
+          </a:xfrm>
+          <a:prstGeom prst="rect">
+            <a:avLst/>
+          </a:prstGeom>
+          <a:noFill/>
+        </p:spPr>
+        <p:txBody>
+          <a:bodyPr wrap="square">
+            <a:spAutoFit/>
+          </a:bodyPr>
+          <a:lstStyle/>
+          <a:p>
+            <a:pPr>
+              <a:lnSpc>
+                <a:spcPct val="150000"/>
+              </a:lnSpc>
+              <a:buNone/>
+            </a:pPr>
+            <a:r>
+              <a:rPr kumimoji="0" lang="en-US" altLang="en-US" sz="1300" b="0" i="0" u="none" strike="noStrike" cap="none" normalizeH="0" baseline="0">
+                <a:ln>
+                  <a:noFill/>
+                </a:ln>
+                <a:solidFill>
+                  <a:schemeClr val="tx1"/>
+                </a:solidFill>
+                <a:effectLst/>
+                <a:latin typeface="Arial" panose="020B0604020202020204" pitchFamily="34" charset="0"/>
+              </a:rPr>
+              <a:t>.</a:t>
+            </a:r>
+          </a:p>
+        </p:txBody>
+      </p:sp>
+    </p:spTree>
+    <p:extLst>
+      <p:ext uri="{BB962C8B-B14F-4D97-AF65-F5344CB8AC3E}">
+        <p14:creationId xmlns:p14="http://schemas.microsoft.com/office/powerpoint/2010/main" val="349307585"/>
+      </p:ext>
+    </p:extLst>
+  </p:cSld>
+  <p:clrMapOvr>
+    <a:masterClrMapping/>
+  </p:clrMapOvr>
+</p:sld>
+</file>
+
+<file path=ppt/slides/slide8.xml><?xml version="1.0" encoding="utf-8"?>
 <p:sld xmlns:a="http://schemas.openxmlformats.org/drawingml/2006/main" xmlns:r="http://schemas.openxmlformats.org/officeDocument/2006/relationships" xmlns:p="http://schemas.openxmlformats.org/presentationml/2006/main">
   <p:cSld>
     <p:spTree>
